--- a/neerlandais1/powerpoints/Module_30_Het_bedrijf.pptx
+++ b/neerlandais1/powerpoints/Module_30_Het_bedrijf.pptx
@@ -136,18 +136,18 @@
   <p:extLst>
     <p:ext uri="{521415D9-36F7-43E2-AB2F-B90AF26B5E84}">
       <p14:sectionLst xmlns:p14="http://schemas.microsoft.com/office/powerpoint/2010/main">
-        <p14:section name="Ouverture" id="{d84e6d4b-d950-e58f-dd55-0c58edb1d1fe}">
+        <p14:section name="Ouverture" id="{8e3910fa-d2c9-d73b-6092-2554e7ab0ad7}">
           <p14:sldIdLst>
             <p14:sldId id="256"/>
           </p14:sldIdLst>
         </p14:section>
-        <p14:section name="Découvrir" id="{87dbd170-0b2b-ec3f-ebd8-b5c8140e9fb2}">
+        <p14:section name="Découvrir" id="{53cb6d40-135e-7710-b7c2-e4d1eed9cdd3}">
           <p14:sldIdLst>
             <p14:sldId id="257"/>
             <p14:sldId id="258"/>
           </p14:sldIdLst>
         </p14:section>
-        <p14:section name="Comprendre" id="{fb83bd4f-b2fb-02fa-bce9-e2d28cf32a94}">
+        <p14:section name="Comprendre" id="{57464bd1-f13a-b1b7-ed12-53eb7518c539}">
           <p14:sldIdLst>
             <p14:sldId id="259"/>
             <p14:sldId id="260"/>
@@ -164,7 +164,7 @@
             <p14:sldId id="271"/>
           </p14:sldIdLst>
         </p14:section>
-        <p14:section name="JIJ NU ! — Oefeningen" id="{44823001-c5ec-d16d-3324-b9d552a59b94}">
+        <p14:section name="JIJ NU ! — Oefeningen" id="{df5f7a0d-214b-dec1-1b82-5e8078b5fce3}">
           <p14:sldIdLst>
             <p14:sldId id="272"/>
             <p14:sldId id="273"/>
@@ -181,7 +181,7 @@
             <p14:sldId id="284"/>
           </p14:sldIdLst>
         </p14:section>
-        <p14:section name="Clôture" id="{ccc66a4c-02bf-fced-3dad-03ffa30a38cd}">
+        <p14:section name="Clôture" id="{7b7aee9b-9ba7-0445-72be-6ca98f17cd02}">
           <p14:sldIdLst>
             <p14:sldId id="285"/>
           </p14:sldIdLst>

--- a/neerlandais1/powerpoints/Module_30_Het_bedrijf.pptx
+++ b/neerlandais1/powerpoints/Module_30_Het_bedrijf.pptx
@@ -136,18 +136,18 @@
   <p:extLst>
     <p:ext uri="{521415D9-36F7-43E2-AB2F-B90AF26B5E84}">
       <p14:sectionLst xmlns:p14="http://schemas.microsoft.com/office/powerpoint/2010/main">
-        <p14:section name="Ouverture" id="{8e3910fa-d2c9-d73b-6092-2554e7ab0ad7}">
+        <p14:section name="Ouverture" id="{d7955797-a4bd-3599-757c-ab72b3be53a5}">
           <p14:sldIdLst>
             <p14:sldId id="256"/>
           </p14:sldIdLst>
         </p14:section>
-        <p14:section name="Découvrir" id="{53cb6d40-135e-7710-b7c2-e4d1eed9cdd3}">
+        <p14:section name="Découvrir" id="{0c0bff3a-05ec-b601-981c-d35853fdfad0}">
           <p14:sldIdLst>
             <p14:sldId id="257"/>
             <p14:sldId id="258"/>
           </p14:sldIdLst>
         </p14:section>
-        <p14:section name="Comprendre" id="{57464bd1-f13a-b1b7-ed12-53eb7518c539}">
+        <p14:section name="Comprendre" id="{7ebc333c-a3c3-e96e-ceb8-af7453e8021b}">
           <p14:sldIdLst>
             <p14:sldId id="259"/>
             <p14:sldId id="260"/>
@@ -164,7 +164,7 @@
             <p14:sldId id="271"/>
           </p14:sldIdLst>
         </p14:section>
-        <p14:section name="JIJ NU ! — Oefeningen" id="{df5f7a0d-214b-dec1-1b82-5e8078b5fce3}">
+        <p14:section name="JIJ NU ! — Oefeningen" id="{48caf520-1136-d86a-98f1-6fd014364811}">
           <p14:sldIdLst>
             <p14:sldId id="272"/>
             <p14:sldId id="273"/>
@@ -181,7 +181,7 @@
             <p14:sldId id="284"/>
           </p14:sldIdLst>
         </p14:section>
-        <p14:section name="Clôture" id="{7b7aee9b-9ba7-0445-72be-6ca98f17cd02}">
+        <p14:section name="Clôture" id="{ec1cbd22-7139-cd56-14b2-5ee783b7a738}">
           <p14:sldIdLst>
             <p14:sldId id="285"/>
           </p14:sldIdLst>

--- a/neerlandais1/powerpoints/Module_30_Het_bedrijf.pptx
+++ b/neerlandais1/powerpoints/Module_30_Het_bedrijf.pptx
@@ -136,18 +136,18 @@
   <p:extLst>
     <p:ext uri="{521415D9-36F7-43E2-AB2F-B90AF26B5E84}">
       <p14:sectionLst xmlns:p14="http://schemas.microsoft.com/office/powerpoint/2010/main">
-        <p14:section name="Ouverture" id="{d7955797-a4bd-3599-757c-ab72b3be53a5}">
+        <p14:section name="Ouverture" id="{6bf75552-4cd4-c574-832f-5f5bb6777c26}">
           <p14:sldIdLst>
             <p14:sldId id="256"/>
           </p14:sldIdLst>
         </p14:section>
-        <p14:section name="Découvrir" id="{0c0bff3a-05ec-b601-981c-d35853fdfad0}">
+        <p14:section name="Découvrir" id="{3d1ab909-f72f-295e-badb-e1d61d3d77e6}">
           <p14:sldIdLst>
             <p14:sldId id="257"/>
             <p14:sldId id="258"/>
           </p14:sldIdLst>
         </p14:section>
-        <p14:section name="Comprendre" id="{7ebc333c-a3c3-e96e-ceb8-af7453e8021b}">
+        <p14:section name="Comprendre" id="{5460ffdb-6150-8590-ca72-b44553562cfb}">
           <p14:sldIdLst>
             <p14:sldId id="259"/>
             <p14:sldId id="260"/>
@@ -164,7 +164,7 @@
             <p14:sldId id="271"/>
           </p14:sldIdLst>
         </p14:section>
-        <p14:section name="JIJ NU ! — Oefeningen" id="{48caf520-1136-d86a-98f1-6fd014364811}">
+        <p14:section name="JIJ NU ! — Oefeningen" id="{16e2767d-5dfe-2cd8-4b4c-5fa50aa91c12}">
           <p14:sldIdLst>
             <p14:sldId id="272"/>
             <p14:sldId id="273"/>
@@ -181,7 +181,7 @@
             <p14:sldId id="284"/>
           </p14:sldIdLst>
         </p14:section>
-        <p14:section name="Clôture" id="{ec1cbd22-7139-cd56-14b2-5ee783b7a738}">
+        <p14:section name="Clôture" id="{12921a2b-9a0f-914a-3091-d72fe14d50f0}">
           <p14:sldIdLst>
             <p14:sldId id="285"/>
           </p14:sldIdLst>

--- a/neerlandais1/powerpoints/Module_30_Het_bedrijf.pptx
+++ b/neerlandais1/powerpoints/Module_30_Het_bedrijf.pptx
@@ -136,18 +136,18 @@
   <p:extLst>
     <p:ext uri="{521415D9-36F7-43E2-AB2F-B90AF26B5E84}">
       <p14:sectionLst xmlns:p14="http://schemas.microsoft.com/office/powerpoint/2010/main">
-        <p14:section name="Ouverture" id="{6bf75552-4cd4-c574-832f-5f5bb6777c26}">
+        <p14:section name="Ouverture" id="{1eba567e-f5f6-641c-d59c-ad1df86f863d}">
           <p14:sldIdLst>
             <p14:sldId id="256"/>
           </p14:sldIdLst>
         </p14:section>
-        <p14:section name="Découvrir" id="{3d1ab909-f72f-295e-badb-e1d61d3d77e6}">
+        <p14:section name="Découvrir" id="{1da68877-3888-4392-e3f3-3423c18bcc0a}">
           <p14:sldIdLst>
             <p14:sldId id="257"/>
             <p14:sldId id="258"/>
           </p14:sldIdLst>
         </p14:section>
-        <p14:section name="Comprendre" id="{5460ffdb-6150-8590-ca72-b44553562cfb}">
+        <p14:section name="Comprendre" id="{5e4eb397-2f7d-c43e-a8a5-39a7f0c6b699}">
           <p14:sldIdLst>
             <p14:sldId id="259"/>
             <p14:sldId id="260"/>
@@ -164,7 +164,7 @@
             <p14:sldId id="271"/>
           </p14:sldIdLst>
         </p14:section>
-        <p14:section name="JIJ NU ! — Oefeningen" id="{16e2767d-5dfe-2cd8-4b4c-5fa50aa91c12}">
+        <p14:section name="JIJ NU ! — Oefeningen" id="{74baee8b-511b-2a8d-eaa2-4d8830007840}">
           <p14:sldIdLst>
             <p14:sldId id="272"/>
             <p14:sldId id="273"/>
@@ -181,7 +181,7 @@
             <p14:sldId id="284"/>
           </p14:sldIdLst>
         </p14:section>
-        <p14:section name="Clôture" id="{12921a2b-9a0f-914a-3091-d72fe14d50f0}">
+        <p14:section name="Clôture" id="{09767092-849a-8419-fed2-faa3d25ab8f6}">
           <p14:sldIdLst>
             <p14:sldId id="285"/>
           </p14:sldIdLst>

--- a/neerlandais1/powerpoints/Module_30_Het_bedrijf.pptx
+++ b/neerlandais1/powerpoints/Module_30_Het_bedrijf.pptx
@@ -136,18 +136,18 @@
   <p:extLst>
     <p:ext uri="{521415D9-36F7-43E2-AB2F-B90AF26B5E84}">
       <p14:sectionLst xmlns:p14="http://schemas.microsoft.com/office/powerpoint/2010/main">
-        <p14:section name="Ouverture" id="{1eba567e-f5f6-641c-d59c-ad1df86f863d}">
+        <p14:section name="Ouverture" id="{19fe56fc-d790-2b54-8805-ce71b9d4d464}">
           <p14:sldIdLst>
             <p14:sldId id="256"/>
           </p14:sldIdLst>
         </p14:section>
-        <p14:section name="Découvrir" id="{1da68877-3888-4392-e3f3-3423c18bcc0a}">
+        <p14:section name="Découvrir" id="{385ae7c4-54b7-70dc-30ad-3e7d683cb58a}">
           <p14:sldIdLst>
             <p14:sldId id="257"/>
             <p14:sldId id="258"/>
           </p14:sldIdLst>
         </p14:section>
-        <p14:section name="Comprendre" id="{5e4eb397-2f7d-c43e-a8a5-39a7f0c6b699}">
+        <p14:section name="Comprendre" id="{843d4811-befa-0264-05e6-b23be1cc8796}">
           <p14:sldIdLst>
             <p14:sldId id="259"/>
             <p14:sldId id="260"/>
@@ -164,7 +164,7 @@
             <p14:sldId id="271"/>
           </p14:sldIdLst>
         </p14:section>
-        <p14:section name="JIJ NU ! — Oefeningen" id="{74baee8b-511b-2a8d-eaa2-4d8830007840}">
+        <p14:section name="JIJ NU ! — Oefeningen" id="{e87cb204-6a09-2fed-a97e-ec42ea66a972}">
           <p14:sldIdLst>
             <p14:sldId id="272"/>
             <p14:sldId id="273"/>
@@ -181,7 +181,7 @@
             <p14:sldId id="284"/>
           </p14:sldIdLst>
         </p14:section>
-        <p14:section name="Clôture" id="{09767092-849a-8419-fed2-faa3d25ab8f6}">
+        <p14:section name="Clôture" id="{4bbfae1f-66ca-18a8-b92b-0403d102ef3b}">
           <p14:sldIdLst>
             <p14:sldId id="285"/>
           </p14:sldIdLst>

--- a/neerlandais1/powerpoints/Module_30_Het_bedrijf.pptx
+++ b/neerlandais1/powerpoints/Module_30_Het_bedrijf.pptx
@@ -136,18 +136,18 @@
   <p:extLst>
     <p:ext uri="{521415D9-36F7-43E2-AB2F-B90AF26B5E84}">
       <p14:sectionLst xmlns:p14="http://schemas.microsoft.com/office/powerpoint/2010/main">
-        <p14:section name="Ouverture" id="{19fe56fc-d790-2b54-8805-ce71b9d4d464}">
+        <p14:section name="Ouverture" id="{049de11a-fd51-a7c6-c40b-f685d321aff6}">
           <p14:sldIdLst>
             <p14:sldId id="256"/>
           </p14:sldIdLst>
         </p14:section>
-        <p14:section name="Découvrir" id="{385ae7c4-54b7-70dc-30ad-3e7d683cb58a}">
+        <p14:section name="Découvrir" id="{3d59737f-8428-3b9b-8302-403c1b0eea48}">
           <p14:sldIdLst>
             <p14:sldId id="257"/>
             <p14:sldId id="258"/>
           </p14:sldIdLst>
         </p14:section>
-        <p14:section name="Comprendre" id="{843d4811-befa-0264-05e6-b23be1cc8796}">
+        <p14:section name="Comprendre" id="{7e7a9ea9-26a7-4868-732d-d32b43ede161}">
           <p14:sldIdLst>
             <p14:sldId id="259"/>
             <p14:sldId id="260"/>
@@ -164,7 +164,7 @@
             <p14:sldId id="271"/>
           </p14:sldIdLst>
         </p14:section>
-        <p14:section name="JIJ NU ! — Oefeningen" id="{e87cb204-6a09-2fed-a97e-ec42ea66a972}">
+        <p14:section name="JIJ NU ! — Oefeningen" id="{ba0207bb-242b-1da8-6107-c430f5f86e5c}">
           <p14:sldIdLst>
             <p14:sldId id="272"/>
             <p14:sldId id="273"/>
@@ -181,7 +181,7 @@
             <p14:sldId id="284"/>
           </p14:sldIdLst>
         </p14:section>
-        <p14:section name="Clôture" id="{4bbfae1f-66ca-18a8-b92b-0403d102ef3b}">
+        <p14:section name="Clôture" id="{cf105d5f-24ff-4a49-85c7-f646b35ae261}">
           <p14:sldIdLst>
             <p14:sldId id="285"/>
           </p14:sldIdLst>

--- a/neerlandais1/powerpoints/Module_30_Het_bedrijf.pptx
+++ b/neerlandais1/powerpoints/Module_30_Het_bedrijf.pptx
@@ -136,18 +136,18 @@
   <p:extLst>
     <p:ext uri="{521415D9-36F7-43E2-AB2F-B90AF26B5E84}">
       <p14:sectionLst xmlns:p14="http://schemas.microsoft.com/office/powerpoint/2010/main">
-        <p14:section name="Ouverture" id="{049de11a-fd51-a7c6-c40b-f685d321aff6}">
+        <p14:section name="Ouverture" id="{059a2acb-2164-08e9-9264-4369c989bddb}">
           <p14:sldIdLst>
             <p14:sldId id="256"/>
           </p14:sldIdLst>
         </p14:section>
-        <p14:section name="Découvrir" id="{3d59737f-8428-3b9b-8302-403c1b0eea48}">
+        <p14:section name="Découvrir" id="{f07ae9bb-922c-ac0e-15b1-f10b8bbd80b5}">
           <p14:sldIdLst>
             <p14:sldId id="257"/>
             <p14:sldId id="258"/>
           </p14:sldIdLst>
         </p14:section>
-        <p14:section name="Comprendre" id="{7e7a9ea9-26a7-4868-732d-d32b43ede161}">
+        <p14:section name="Comprendre" id="{56eb8484-45f3-3080-1768-99d2e5a59b57}">
           <p14:sldIdLst>
             <p14:sldId id="259"/>
             <p14:sldId id="260"/>
@@ -164,7 +164,7 @@
             <p14:sldId id="271"/>
           </p14:sldIdLst>
         </p14:section>
-        <p14:section name="JIJ NU ! — Oefeningen" id="{ba0207bb-242b-1da8-6107-c430f5f86e5c}">
+        <p14:section name="JIJ NU ! — Oefeningen" id="{d095ec83-b5d3-be0b-2c59-94c97bd411d7}">
           <p14:sldIdLst>
             <p14:sldId id="272"/>
             <p14:sldId id="273"/>
@@ -181,7 +181,7 @@
             <p14:sldId id="284"/>
           </p14:sldIdLst>
         </p14:section>
-        <p14:section name="Clôture" id="{cf105d5f-24ff-4a49-85c7-f646b35ae261}">
+        <p14:section name="Clôture" id="{b5c82910-07ab-d5c5-03e5-cae103db7714}">
           <p14:sldIdLst>
             <p14:sldId id="285"/>
           </p14:sldIdLst>

--- a/neerlandais1/powerpoints/Module_30_Het_bedrijf.pptx
+++ b/neerlandais1/powerpoints/Module_30_Het_bedrijf.pptx
@@ -136,18 +136,18 @@
   <p:extLst>
     <p:ext uri="{521415D9-36F7-43E2-AB2F-B90AF26B5E84}">
       <p14:sectionLst xmlns:p14="http://schemas.microsoft.com/office/powerpoint/2010/main">
-        <p14:section name="Ouverture" id="{059a2acb-2164-08e9-9264-4369c989bddb}">
+        <p14:section name="Ouverture" id="{7dd1d1c4-2d26-ed62-7033-8cb30b32c469}">
           <p14:sldIdLst>
             <p14:sldId id="256"/>
           </p14:sldIdLst>
         </p14:section>
-        <p14:section name="Découvrir" id="{f07ae9bb-922c-ac0e-15b1-f10b8bbd80b5}">
+        <p14:section name="Découvrir" id="{92ba7ff4-c0c2-98c1-bda6-8f714d66a8a8}">
           <p14:sldIdLst>
             <p14:sldId id="257"/>
             <p14:sldId id="258"/>
           </p14:sldIdLst>
         </p14:section>
-        <p14:section name="Comprendre" id="{56eb8484-45f3-3080-1768-99d2e5a59b57}">
+        <p14:section name="Comprendre" id="{ce64d850-1db5-1c77-d1bf-7f54ce9bebe2}">
           <p14:sldIdLst>
             <p14:sldId id="259"/>
             <p14:sldId id="260"/>
@@ -164,7 +164,7 @@
             <p14:sldId id="271"/>
           </p14:sldIdLst>
         </p14:section>
-        <p14:section name="JIJ NU ! — Oefeningen" id="{d095ec83-b5d3-be0b-2c59-94c97bd411d7}">
+        <p14:section name="JIJ NU ! — Oefeningen" id="{aa131446-39cb-b277-817b-9bcaa100f506}">
           <p14:sldIdLst>
             <p14:sldId id="272"/>
             <p14:sldId id="273"/>
@@ -181,7 +181,7 @@
             <p14:sldId id="284"/>
           </p14:sldIdLst>
         </p14:section>
-        <p14:section name="Clôture" id="{b5c82910-07ab-d5c5-03e5-cae103db7714}">
+        <p14:section name="Clôture" id="{f319e0d9-2926-d30e-5f71-274ef49eef30}">
           <p14:sldIdLst>
             <p14:sldId id="285"/>
           </p14:sldIdLst>
